--- a/templates/midnight-blue.pptx
+++ b/templates/midnight-blue.pptx
@@ -356,7 +356,7 @@
         <p:spPr>
           <a:xfrm>
             <a:off x="838200" y="1825625"/>
-            <a:ext cx="5181600" cy="4351338"/>
+            <a:ext cx="5120640" cy="4351338"/>
           </a:xfrm>
         </p:spPr>
         <p:txBody>
@@ -390,8 +390,8 @@
         </p:nvSpPr>
         <p:spPr>
           <a:xfrm>
-            <a:off x="6172200" y="1825625"/>
-            <a:ext cx="5181600" cy="4351338"/>
+            <a:off x="6233160" y="1825625"/>
+            <a:ext cx="5120640" cy="4351338"/>
           </a:xfrm>
         </p:spPr>
         <p:txBody>

--- a/templates/midnight-blue.pptx
+++ b/templates/midnight-blue.pptx
@@ -546,8 +546,8 @@
         </p:nvSpPr>
         <p:spPr>
           <a:xfrm>
-            <a:off x="1485900" y="685800"/>
-            <a:ext cx="9486900" cy="1851025"/>
+            <a:off x="1524000" y="1122363"/>
+            <a:ext cx="9144000" cy="2387600"/>
           </a:xfrm>
         </p:spPr>
         <p:txBody>
@@ -580,8 +580,8 @@
         </p:nvSpPr>
         <p:spPr>
           <a:xfrm>
-            <a:off x="1485900" y="2667000"/>
-            <a:ext cx="9486900" cy="1371600"/>
+            <a:off x="1524000" y="3602038"/>
+            <a:ext cx="9144000" cy="1655762"/>
           </a:xfrm>
         </p:spPr>
         <p:txBody>
